--- a/app/templates/slideshow/minimal-white/template.pptx
+++ b/app/templates/slideshow/minimal-white/template.pptx
@@ -1498,31 +1498,33 @@
           <a:chExt cx="0" cy="0"/>
         </a:xfrm>
       </p:grpSpPr>
-      <p:sp>
-        <p:nvSpPr>
-          <p:cNvPr id="2" name="BackgroundImage"/>
-          <p:cNvSpPr/>
-          <p:nvPr/>
-        </p:nvSpPr>
+      <p:pic>
+        <p:nvPicPr>
+          <p:cNvPr id="2" name="BackgroundImage" descr="preencoded.png">    </p:cNvPr>
+          <p:cNvPicPr>
+            <a:picLocks noChangeAspect="1"/>
+          </p:cNvPicPr>
+          <p:nvPr/>
+        </p:nvPicPr>
+        <p:blipFill>
+          <a:blip r:embed="rId1"/>
+          <a:stretch>
+            <a:fillRect/>
+          </a:stretch>
+        </p:blipFill>
         <p:spPr>
           <a:xfrm>
             <a:off x="0" y="0"/>
             <a:ext cx="9144000" cy="5148072"/>
           </a:xfrm>
-          <a:prstGeom prst="roundRect">
-            <a:avLst/>
-          </a:prstGeom>
-          <a:solidFill>
-            <a:srgbClr val="E8EDFF">
-              <a:alpha val="20000"/>
-            </a:srgbClr>
-          </a:solidFill>
-          <a:ln/>
-        </p:spPr>
-      </p:sp>
-      <p:sp>
-        <p:nvSpPr>
-          <p:cNvPr id="3" name="Shape 1"/>
+          <a:prstGeom prst="rect">
+            <a:avLst/>
+          </a:prstGeom>
+        </p:spPr>
+      </p:pic>
+      <p:sp>
+        <p:nvSpPr>
+          <p:cNvPr id="3" name="Shape 0"/>
           <p:cNvSpPr/>
           <p:nvPr/>
         </p:nvSpPr>
@@ -1542,7 +1544,7 @@
       </p:sp>
       <p:sp>
         <p:nvSpPr>
-          <p:cNvPr id="4" name="Shape 2"/>
+          <p:cNvPr id="4" name="Shape 1"/>
           <p:cNvSpPr/>
           <p:nvPr/>
         </p:nvSpPr>
@@ -2118,30 +2120,30 @@
           </a:p>
         </p:txBody>
       </p:sp>
-      <p:sp>
-        <p:nvSpPr>
-          <p:cNvPr id="6" name="ImageShape"/>
-          <p:cNvSpPr/>
-          <p:nvPr/>
-        </p:nvSpPr>
+      <p:pic>
+        <p:nvPicPr>
+          <p:cNvPr id="6" name="ImageShape" descr="preencoded.png">    </p:cNvPr>
+          <p:cNvPicPr>
+            <a:picLocks noChangeAspect="1"/>
+          </p:cNvPicPr>
+          <p:nvPr/>
+        </p:nvPicPr>
+        <p:blipFill>
+          <a:blip r:embed="rId1"/>
+          <a:stretch>
+            <a:fillRect/>
+          </a:stretch>
+        </p:blipFill>
         <p:spPr>
           <a:xfrm>
             <a:off x="5669280" y="365760"/>
             <a:ext cx="3108960" cy="4389120"/>
           </a:xfrm>
-          <a:prstGeom prst="roundRect">
-            <a:avLst>
-              <a:gd name="adj" fmla="val 4412"/>
-            </a:avLst>
-          </a:prstGeom>
-          <a:solidFill>
-            <a:srgbClr val="E8EDFF">
-              <a:alpha val="50000"/>
-            </a:srgbClr>
-          </a:solidFill>
-          <a:ln/>
-        </p:spPr>
-      </p:sp>
+          <a:prstGeom prst="rect">
+            <a:avLst/>
+          </a:prstGeom>
+        </p:spPr>
+      </p:pic>
     </p:spTree>
   </p:cSld>
   <p:clrMapOvr>
@@ -2275,30 +2277,30 @@
           </a:p>
         </p:txBody>
       </p:sp>
-      <p:sp>
-        <p:nvSpPr>
-          <p:cNvPr id="5" name="ImageShape"/>
-          <p:cNvSpPr/>
-          <p:nvPr/>
-        </p:nvSpPr>
+      <p:pic>
+        <p:nvPicPr>
+          <p:cNvPr id="5" name="ImageShape" descr="preencoded.png">    </p:cNvPr>
+          <p:cNvPicPr>
+            <a:picLocks noChangeAspect="1"/>
+          </p:cNvPicPr>
+          <p:nvPr/>
+        </p:nvPicPr>
+        <p:blipFill>
+          <a:blip r:embed="rId1"/>
+          <a:stretch>
+            <a:fillRect/>
+          </a:stretch>
+        </p:blipFill>
         <p:spPr>
           <a:xfrm>
             <a:off x="457200" y="2468880"/>
             <a:ext cx="8229600" cy="2468880"/>
           </a:xfrm>
-          <a:prstGeom prst="roundRect">
-            <a:avLst>
-              <a:gd name="adj" fmla="val 5556"/>
-            </a:avLst>
-          </a:prstGeom>
-          <a:solidFill>
-            <a:srgbClr val="E8EDFF">
-              <a:alpha val="50000"/>
-            </a:srgbClr>
-          </a:solidFill>
-          <a:ln/>
-        </p:spPr>
-      </p:sp>
+          <a:prstGeom prst="rect">
+            <a:avLst/>
+          </a:prstGeom>
+        </p:spPr>
+      </p:pic>
     </p:spTree>
   </p:cSld>
   <p:clrMapOvr>
@@ -2591,30 +2593,30 @@
           </a:p>
         </p:txBody>
       </p:sp>
-      <p:sp>
-        <p:nvSpPr>
-          <p:cNvPr id="5" name="ImageShape"/>
-          <p:cNvSpPr/>
-          <p:nvPr/>
-        </p:nvSpPr>
+      <p:pic>
+        <p:nvPicPr>
+          <p:cNvPr id="5" name="ImageShape" descr="preencoded.png">    </p:cNvPr>
+          <p:cNvPicPr>
+            <a:picLocks noChangeAspect="1"/>
+          </p:cNvPicPr>
+          <p:nvPr/>
+        </p:nvPicPr>
+        <p:blipFill>
+          <a:blip r:embed="rId1"/>
+          <a:stretch>
+            <a:fillRect/>
+          </a:stretch>
+        </p:blipFill>
         <p:spPr>
           <a:xfrm>
             <a:off x="1371600" y="2743200"/>
             <a:ext cx="6400800" cy="2103120"/>
           </a:xfrm>
-          <a:prstGeom prst="roundRect">
-            <a:avLst>
-              <a:gd name="adj" fmla="val 6522"/>
-            </a:avLst>
-          </a:prstGeom>
-          <a:solidFill>
-            <a:srgbClr val="E8EDFF">
-              <a:alpha val="50000"/>
-            </a:srgbClr>
-          </a:solidFill>
-          <a:ln/>
-        </p:spPr>
-      </p:sp>
+          <a:prstGeom prst="rect">
+            <a:avLst/>
+          </a:prstGeom>
+        </p:spPr>
+      </p:pic>
     </p:spTree>
   </p:cSld>
   <p:clrMapOvr>
